--- a/spectral-causality-brainstorm/spectral_causality_figures.pptx
+++ b/spectral-causality-brainstorm/spectral_causality_figures.pptx
@@ -3768,7 +3768,7 @@
         <p:spPr>
           <a:xfrm>
             <a:off x="1066647" y="914400"/>
-            <a:ext cx="10058400" cy="4087981"/>
+            <a:ext cx="10058400" cy="4375313"/>
           </a:xfrm>
           <a:prstGeom prst="rect">
             <a:avLst/>
